--- a/PnP_02_04_2026_CopilotChatAPIinSPFx.pptx
+++ b/PnP_02_04_2026_CopilotChatAPIinSPFx.pptx
@@ -5,19 +5,20 @@
     <p:sldMasterId id="2147484300" r:id="rId4"/>
   </p:sldMasterIdLst>
   <p:notesMasterIdLst>
-    <p:notesMasterId r:id="rId12"/>
+    <p:notesMasterId r:id="rId13"/>
   </p:notesMasterIdLst>
   <p:handoutMasterIdLst>
-    <p:handoutMasterId r:id="rId13"/>
+    <p:handoutMasterId r:id="rId14"/>
   </p:handoutMasterIdLst>
   <p:sldIdLst>
     <p:sldId id="4227" r:id="rId5"/>
     <p:sldId id="1500" r:id="rId6"/>
     <p:sldId id="4246" r:id="rId7"/>
     <p:sldId id="4253" r:id="rId8"/>
-    <p:sldId id="4233" r:id="rId9"/>
-    <p:sldId id="4251" r:id="rId10"/>
-    <p:sldId id="4234" r:id="rId11"/>
+    <p:sldId id="4254" r:id="rId9"/>
+    <p:sldId id="4233" r:id="rId10"/>
+    <p:sldId id="4251" r:id="rId11"/>
+    <p:sldId id="4234" r:id="rId12"/>
   </p:sldIdLst>
   <p:sldSz cx="12436475" cy="6994525"/>
   <p:notesSz cx="6881813" cy="9296400"/>
@@ -125,6 +126,7 @@
             <p14:sldId id="1500"/>
             <p14:sldId id="4246"/>
             <p14:sldId id="4253"/>
+            <p14:sldId id="4254"/>
             <p14:sldId id="4233"/>
             <p14:sldId id="4251"/>
             <p14:sldId id="4234"/>
@@ -3113,7 +3115,7 @@
             <a:fld id="{B4008EB6-D09E-4580-8CD6-DDB14511944F}" type="slidenum">
               <a:rPr lang="en-US" smtClean="0"/>
               <a:pPr/>
-              <a:t>5</a:t>
+              <a:t>6</a:t>
             </a:fld>
             <a:endParaRPr lang="en-US"/>
           </a:p>
@@ -16517,7 +16519,7 @@
         <p:spPr>
           <a:xfrm>
             <a:off x="0" y="3062431"/>
-            <a:ext cx="7286273" cy="469039"/>
+            <a:ext cx="5290457" cy="469039"/>
           </a:xfrm>
           <a:prstGeom prst="rect">
             <a:avLst/>
@@ -16538,17 +16540,7 @@
                 <a:latin typeface="Proxima Nova Semibold" panose="02000506030000020004" pitchFamily="50" charset="0"/>
                 <a:cs typeface="Roboto Regular"/>
               </a:rPr>
-              <a:t>Siddharth Vaghasia </a:t>
-            </a:r>
-            <a:r>
-              <a:rPr lang="en-US" sz="2448" dirty="0">
-                <a:solidFill>
-                  <a:schemeClr val="bg1"/>
-                </a:solidFill>
-                <a:latin typeface="Proxima Nova" panose="02000506030000020004" pitchFamily="50" charset="0"/>
-                <a:cs typeface="Roboto Regular"/>
-              </a:rPr>
-              <a:t>(@siddh_me)</a:t>
+              <a:t>Siddharth Vaghasia</a:t>
             </a:r>
           </a:p>
         </p:txBody>
@@ -17099,6 +17091,50 @@
           </a:p>
         </p:txBody>
       </p:sp>
+      <p:sp>
+        <p:nvSpPr>
+          <p:cNvPr id="8" name="TextBox 7">
+            <a:extLst>
+              <a:ext uri="{FF2B5EF4-FFF2-40B4-BE49-F238E27FC236}">
+                <a16:creationId xmlns:a16="http://schemas.microsoft.com/office/drawing/2014/main" id="{6277F54E-4CCA-66C0-7E82-921688CCB466}"/>
+              </a:ext>
+            </a:extLst>
+          </p:cNvPr>
+          <p:cNvSpPr txBox="1"/>
+          <p:nvPr/>
+        </p:nvSpPr>
+        <p:spPr>
+          <a:xfrm>
+            <a:off x="7831090" y="2741462"/>
+            <a:ext cx="4697963" cy="369332"/>
+          </a:xfrm>
+          <a:prstGeom prst="rect">
+            <a:avLst/>
+          </a:prstGeom>
+          <a:noFill/>
+        </p:spPr>
+        <p:txBody>
+          <a:bodyPr wrap="square">
+            <a:spAutoFit/>
+          </a:bodyPr>
+          <a:lstStyle/>
+          <a:p>
+            <a:pPr fontAlgn="t"/>
+            <a:r>
+              <a:rPr lang="en-US" sz="1800" dirty="0">
+                <a:solidFill>
+                  <a:schemeClr val="tx1">
+                    <a:lumMod val="50000"/>
+                  </a:schemeClr>
+                </a:solidFill>
+                <a:latin typeface="Proxima Nova" panose="02000506030000020004" pitchFamily="50" charset="0"/>
+                <a:cs typeface="Roboto Regular"/>
+              </a:rPr>
+              <a:t>https://www.youtube.com/@codeman5277</a:t>
+            </a:r>
+          </a:p>
+        </p:txBody>
+      </p:sp>
     </p:spTree>
     <p:extLst>
       <p:ext uri="{BB962C8B-B14F-4D97-AF65-F5344CB8AC3E}">
@@ -17253,7 +17289,7 @@
         </p:blipFill>
         <p:spPr bwMode="auto">
           <a:xfrm>
-            <a:off x="4938510" y="4139798"/>
+            <a:off x="4471979" y="3655052"/>
             <a:ext cx="2559453" cy="2559453"/>
           </a:xfrm>
           <a:prstGeom prst="rect">
@@ -17487,7 +17523,46 @@
                 </a:solidFill>
                 <a:latin typeface="+mj-lt"/>
               </a:rPr>
-              <a:t>Passing custom contextual data to generate meaningful responses </a:t>
+              <a:t>Passing custom contextual data to API</a:t>
+            </a:r>
+          </a:p>
+        </p:txBody>
+      </p:sp>
+      <p:sp>
+        <p:nvSpPr>
+          <p:cNvPr id="7" name="TextBox 6">
+            <a:extLst>
+              <a:ext uri="{FF2B5EF4-FFF2-40B4-BE49-F238E27FC236}">
+                <a16:creationId xmlns:a16="http://schemas.microsoft.com/office/drawing/2014/main" id="{65B6780C-3975-6ACD-DAA9-4237533E8669}"/>
+              </a:ext>
+            </a:extLst>
+          </p:cNvPr>
+          <p:cNvSpPr txBox="1"/>
+          <p:nvPr/>
+        </p:nvSpPr>
+        <p:spPr>
+          <a:xfrm>
+            <a:off x="274638" y="6348194"/>
+            <a:ext cx="9765101" cy="369332"/>
+          </a:xfrm>
+          <a:prstGeom prst="rect">
+            <a:avLst/>
+          </a:prstGeom>
+          <a:noFill/>
+        </p:spPr>
+        <p:txBody>
+          <a:bodyPr wrap="square">
+            <a:spAutoFit/>
+          </a:bodyPr>
+          <a:lstStyle/>
+          <a:p>
+            <a:r>
+              <a:rPr lang="en-IN" dirty="0">
+                <a:solidFill>
+                  <a:schemeClr val="bg1"/>
+                </a:solidFill>
+              </a:rPr>
+              <a:t>https://github.com/pnp/sp-dev-fx-webparts/tree/main/samples/react-copilot-chat-api-demo</a:t>
             </a:r>
           </a:p>
         </p:txBody>
@@ -17597,57 +17672,6 @@
                 </a:solidFill>
               </a:rPr>
               <a:t>How Copilot Chat API works?</a:t>
-            </a:r>
-          </a:p>
-        </p:txBody>
-      </p:sp>
-      <p:sp>
-        <p:nvSpPr>
-          <p:cNvPr id="3" name="TextBox 2">
-            <a:extLst>
-              <a:ext uri="{FF2B5EF4-FFF2-40B4-BE49-F238E27FC236}">
-                <a16:creationId xmlns:a16="http://schemas.microsoft.com/office/drawing/2014/main" id="{CB5A2D28-7BAB-7036-7854-40A802041CE4}"/>
-              </a:ext>
-            </a:extLst>
-          </p:cNvPr>
-          <p:cNvSpPr txBox="1"/>
-          <p:nvPr/>
-        </p:nvSpPr>
-        <p:spPr>
-          <a:xfrm>
-            <a:off x="381133" y="6276814"/>
-            <a:ext cx="9191624" cy="369332"/>
-          </a:xfrm>
-          <a:prstGeom prst="rect">
-            <a:avLst/>
-          </a:prstGeom>
-          <a:noFill/>
-        </p:spPr>
-        <p:txBody>
-          <a:bodyPr wrap="square">
-            <a:spAutoFit/>
-          </a:bodyPr>
-          <a:lstStyle/>
-          <a:p>
-            <a:r>
-              <a:rPr lang="en-US" b="1" dirty="0">
-                <a:solidFill>
-                  <a:schemeClr val="tx1">
-                    <a:lumMod val="50000"/>
-                  </a:schemeClr>
-                </a:solidFill>
-              </a:rPr>
-              <a:t>Sample gallery - </a:t>
-            </a:r>
-            <a:r>
-              <a:rPr lang="en-US" sz="1800" b="1" dirty="0">
-                <a:solidFill>
-                  <a:schemeClr val="tx1">
-                    <a:lumMod val="50000"/>
-                  </a:schemeClr>
-                </a:solidFill>
-              </a:rPr>
-              <a:t>https://adoption.microsoft.com/en-us/sample-solution-gallery/1</a:t>
             </a:r>
           </a:p>
         </p:txBody>
@@ -17807,7 +17831,7 @@
                 <a:effectLst/>
                 <a:latin typeface="Segoe UI" panose="020B0502040204020203" pitchFamily="34" charset="0"/>
               </a:rPr>
-              <a:t>: chat</a:t>
+              <a:t>: chat (synchronously)</a:t>
             </a:r>
           </a:p>
         </p:txBody>
@@ -17847,6 +17871,209 @@
           </a:p>
         </p:txBody>
       </p:sp>
+      <p:sp>
+        <p:nvSpPr>
+          <p:cNvPr id="5" name="TextBox 4">
+            <a:extLst>
+              <a:ext uri="{FF2B5EF4-FFF2-40B4-BE49-F238E27FC236}">
+                <a16:creationId xmlns:a16="http://schemas.microsoft.com/office/drawing/2014/main" id="{83059248-3D4B-7E99-78BE-5AC492530654}"/>
+              </a:ext>
+            </a:extLst>
+          </p:cNvPr>
+          <p:cNvSpPr txBox="1"/>
+          <p:nvPr/>
+        </p:nvSpPr>
+        <p:spPr>
+          <a:xfrm>
+            <a:off x="536510" y="4893607"/>
+            <a:ext cx="6858000" cy="646331"/>
+          </a:xfrm>
+          <a:prstGeom prst="rect">
+            <a:avLst/>
+          </a:prstGeom>
+          <a:noFill/>
+        </p:spPr>
+        <p:txBody>
+          <a:bodyPr wrap="square">
+            <a:spAutoFit/>
+          </a:bodyPr>
+          <a:lstStyle/>
+          <a:p>
+            <a:pPr algn="l">
+              <a:buNone/>
+            </a:pPr>
+            <a:r>
+              <a:rPr lang="en-IN" b="1" i="0" dirty="0" err="1">
+                <a:solidFill>
+                  <a:srgbClr val="161616"/>
+                </a:solidFill>
+                <a:effectLst/>
+                <a:latin typeface="Segoe UI" panose="020B0502040204020203" pitchFamily="34" charset="0"/>
+              </a:rPr>
+              <a:t>copilotConversation</a:t>
+            </a:r>
+            <a:r>
+              <a:rPr lang="en-IN" b="1" i="0" dirty="0">
+                <a:solidFill>
+                  <a:srgbClr val="161616"/>
+                </a:solidFill>
+                <a:effectLst/>
+                <a:latin typeface="Segoe UI" panose="020B0502040204020203" pitchFamily="34" charset="0"/>
+              </a:rPr>
+              <a:t>: </a:t>
+            </a:r>
+            <a:r>
+              <a:rPr lang="en-IN" b="1" i="0" dirty="0" err="1">
+                <a:solidFill>
+                  <a:srgbClr val="161616"/>
+                </a:solidFill>
+                <a:effectLst/>
+                <a:latin typeface="Segoe UI" panose="020B0502040204020203" pitchFamily="34" charset="0"/>
+              </a:rPr>
+              <a:t>chatOverStream</a:t>
+            </a:r>
+            <a:endParaRPr lang="en-IN" b="1" i="0" dirty="0">
+              <a:solidFill>
+                <a:srgbClr val="161616"/>
+              </a:solidFill>
+              <a:effectLst/>
+              <a:latin typeface="Segoe UI" panose="020B0502040204020203" pitchFamily="34" charset="0"/>
+            </a:endParaRPr>
+          </a:p>
+          <a:p>
+            <a:pPr algn="l">
+              <a:buNone/>
+            </a:pPr>
+            <a:endParaRPr lang="en-IN" b="1" i="0" dirty="0">
+              <a:solidFill>
+                <a:srgbClr val="161616"/>
+              </a:solidFill>
+              <a:effectLst/>
+              <a:latin typeface="Segoe UI" panose="020B0502040204020203" pitchFamily="34" charset="0"/>
+            </a:endParaRPr>
+          </a:p>
+        </p:txBody>
+      </p:sp>
+      <p:sp>
+        <p:nvSpPr>
+          <p:cNvPr id="7" name="TextBox 6">
+            <a:extLst>
+              <a:ext uri="{FF2B5EF4-FFF2-40B4-BE49-F238E27FC236}">
+                <a16:creationId xmlns:a16="http://schemas.microsoft.com/office/drawing/2014/main" id="{678929FA-20E4-DB98-3FA3-29247F988D00}"/>
+              </a:ext>
+            </a:extLst>
+          </p:cNvPr>
+          <p:cNvSpPr txBox="1"/>
+          <p:nvPr/>
+        </p:nvSpPr>
+        <p:spPr>
+          <a:xfrm>
+            <a:off x="1180320" y="5351721"/>
+            <a:ext cx="9736495" cy="646331"/>
+          </a:xfrm>
+          <a:prstGeom prst="rect">
+            <a:avLst/>
+          </a:prstGeom>
+          <a:noFill/>
+        </p:spPr>
+        <p:txBody>
+          <a:bodyPr wrap="square">
+            <a:spAutoFit/>
+          </a:bodyPr>
+          <a:lstStyle/>
+          <a:p>
+            <a:r>
+              <a:rPr lang="en-IN" dirty="0"/>
+              <a:t>POST https://graph.microsoft.com/beta/copilot/conversations/{conversationId}/chatOverStream</a:t>
+            </a:r>
+          </a:p>
+        </p:txBody>
+      </p:sp>
+      <p:sp>
+        <p:nvSpPr>
+          <p:cNvPr id="11" name="TextBox 10">
+            <a:extLst>
+              <a:ext uri="{FF2B5EF4-FFF2-40B4-BE49-F238E27FC236}">
+                <a16:creationId xmlns:a16="http://schemas.microsoft.com/office/drawing/2014/main" id="{5E221E9A-1A38-D3B6-6813-BF0814C36208}"/>
+              </a:ext>
+            </a:extLst>
+          </p:cNvPr>
+          <p:cNvSpPr txBox="1"/>
+          <p:nvPr/>
+        </p:nvSpPr>
+        <p:spPr>
+          <a:xfrm>
+            <a:off x="536510" y="6180930"/>
+            <a:ext cx="6858000" cy="369332"/>
+          </a:xfrm>
+          <a:prstGeom prst="rect">
+            <a:avLst/>
+          </a:prstGeom>
+          <a:noFill/>
+        </p:spPr>
+        <p:txBody>
+          <a:bodyPr wrap="square">
+            <a:spAutoFit/>
+          </a:bodyPr>
+          <a:lstStyle/>
+          <a:p>
+            <a:r>
+              <a:rPr lang="en-US" b="0" i="0" dirty="0">
+                <a:solidFill>
+                  <a:srgbClr val="161616"/>
+                </a:solidFill>
+                <a:effectLst/>
+                <a:latin typeface="Segoe UI" panose="020B0502040204020203" pitchFamily="34" charset="0"/>
+              </a:rPr>
+              <a:t>Send a chat message to Copilot and receive a streaming response.</a:t>
+            </a:r>
+            <a:endParaRPr lang="en-IN" dirty="0"/>
+          </a:p>
+        </p:txBody>
+      </p:sp>
+      <p:cxnSp>
+        <p:nvCxnSpPr>
+          <p:cNvPr id="15" name="Straight Connector 14">
+            <a:extLst>
+              <a:ext uri="{FF2B5EF4-FFF2-40B4-BE49-F238E27FC236}">
+                <a16:creationId xmlns:a16="http://schemas.microsoft.com/office/drawing/2014/main" id="{41B188EA-787C-7051-F176-953ECEF1110A}"/>
+              </a:ext>
+            </a:extLst>
+          </p:cNvPr>
+          <p:cNvCxnSpPr/>
+          <p:nvPr/>
+        </p:nvCxnSpPr>
+        <p:spPr>
+          <a:xfrm>
+            <a:off x="381133" y="4338735"/>
+            <a:ext cx="11580712" cy="0"/>
+          </a:xfrm>
+          <a:prstGeom prst="line">
+            <a:avLst/>
+          </a:prstGeom>
+          <a:ln>
+            <a:solidFill>
+              <a:schemeClr val="tx1"/>
+            </a:solidFill>
+            <a:headEnd type="none"/>
+            <a:tailEnd type="none"/>
+          </a:ln>
+        </p:spPr>
+        <p:style>
+          <a:lnRef idx="1">
+            <a:schemeClr val="accent1"/>
+          </a:lnRef>
+          <a:fillRef idx="0">
+            <a:schemeClr val="accent1"/>
+          </a:fillRef>
+          <a:effectRef idx="0">
+            <a:schemeClr val="accent1"/>
+          </a:effectRef>
+          <a:fontRef idx="minor">
+            <a:schemeClr val="tx1"/>
+          </a:fontRef>
+        </p:style>
+      </p:cxnSp>
     </p:spTree>
     <p:extLst>
       <p:ext uri="{BB962C8B-B14F-4D97-AF65-F5344CB8AC3E}">
@@ -17864,6 +18091,136 @@
 </file>
 
 <file path=ppt/slides/slide5.xml><?xml version="1.0" encoding="utf-8"?>
+<p:sld xmlns:a="http://schemas.openxmlformats.org/drawingml/2006/main" xmlns:r="http://schemas.openxmlformats.org/officeDocument/2006/relationships" xmlns:p="http://schemas.openxmlformats.org/presentationml/2006/main">
+  <p:cSld>
+    <p:spTree>
+      <p:nvGrpSpPr>
+        <p:cNvPr id="1" name=""/>
+        <p:cNvGrpSpPr/>
+        <p:nvPr/>
+      </p:nvGrpSpPr>
+      <p:grpSpPr>
+        <a:xfrm>
+          <a:off x="0" y="0"/>
+          <a:ext cx="0" cy="0"/>
+          <a:chOff x="0" y="0"/>
+          <a:chExt cx="0" cy="0"/>
+        </a:xfrm>
+      </p:grpSpPr>
+      <p:sp>
+        <p:nvSpPr>
+          <p:cNvPr id="3" name="Title 2">
+            <a:extLst>
+              <a:ext uri="{FF2B5EF4-FFF2-40B4-BE49-F238E27FC236}">
+                <a16:creationId xmlns:a16="http://schemas.microsoft.com/office/drawing/2014/main" id="{571E4D83-0BA4-22BA-802F-F07C54692CBF}"/>
+              </a:ext>
+            </a:extLst>
+          </p:cNvPr>
+          <p:cNvSpPr>
+            <a:spLocks noGrp="1"/>
+          </p:cNvSpPr>
+          <p:nvPr>
+            <p:ph type="title"/>
+          </p:nvPr>
+        </p:nvSpPr>
+        <p:spPr/>
+        <p:txBody>
+          <a:bodyPr/>
+          <a:lstStyle/>
+          <a:p>
+            <a:r>
+              <a:rPr lang="en-IN" dirty="0">
+                <a:solidFill>
+                  <a:srgbClr val="1A8387"/>
+                </a:solidFill>
+              </a:rPr>
+              <a:t>Permissions</a:t>
+            </a:r>
+          </a:p>
+        </p:txBody>
+      </p:sp>
+      <p:sp>
+        <p:nvSpPr>
+          <p:cNvPr id="7" name="TextBox 6">
+            <a:extLst>
+              <a:ext uri="{FF2B5EF4-FFF2-40B4-BE49-F238E27FC236}">
+                <a16:creationId xmlns:a16="http://schemas.microsoft.com/office/drawing/2014/main" id="{C3669DC9-97F7-17F5-B632-FBCB38A49364}"/>
+              </a:ext>
+            </a:extLst>
+          </p:cNvPr>
+          <p:cNvSpPr txBox="1"/>
+          <p:nvPr/>
+        </p:nvSpPr>
+        <p:spPr>
+          <a:xfrm>
+            <a:off x="415213" y="5845828"/>
+            <a:ext cx="12209106" cy="646331"/>
+          </a:xfrm>
+          <a:prstGeom prst="rect">
+            <a:avLst/>
+          </a:prstGeom>
+          <a:noFill/>
+        </p:spPr>
+        <p:txBody>
+          <a:bodyPr wrap="square">
+            <a:spAutoFit/>
+          </a:bodyPr>
+          <a:lstStyle/>
+          <a:p>
+            <a:r>
+              <a:rPr lang="en-IN" dirty="0"/>
+              <a:t>https://learn.microsoft.com/en-us/microsoft-365/copilot/extensibility/api/ai-services/chat/copilotroot-post-conversations</a:t>
+            </a:r>
+          </a:p>
+        </p:txBody>
+      </p:sp>
+      <p:pic>
+        <p:nvPicPr>
+          <p:cNvPr id="9" name="Picture 8">
+            <a:extLst>
+              <a:ext uri="{FF2B5EF4-FFF2-40B4-BE49-F238E27FC236}">
+                <a16:creationId xmlns:a16="http://schemas.microsoft.com/office/drawing/2014/main" id="{90A28164-28BB-C5E4-284E-FF456CC00212}"/>
+              </a:ext>
+            </a:extLst>
+          </p:cNvPr>
+          <p:cNvPicPr>
+            <a:picLocks noChangeAspect="1"/>
+          </p:cNvPicPr>
+          <p:nvPr/>
+        </p:nvPicPr>
+        <p:blipFill>
+          <a:blip r:embed="rId2"/>
+          <a:stretch>
+            <a:fillRect/>
+          </a:stretch>
+        </p:blipFill>
+        <p:spPr>
+          <a:xfrm>
+            <a:off x="655441" y="1450942"/>
+            <a:ext cx="10675101" cy="3848846"/>
+          </a:xfrm>
+          <a:prstGeom prst="rect">
+            <a:avLst/>
+          </a:prstGeom>
+        </p:spPr>
+      </p:pic>
+    </p:spTree>
+    <p:extLst>
+      <p:ext uri="{BB962C8B-B14F-4D97-AF65-F5344CB8AC3E}">
+        <p14:creationId xmlns:p14="http://schemas.microsoft.com/office/powerpoint/2010/main" val="3921844718"/>
+      </p:ext>
+    </p:extLst>
+  </p:cSld>
+  <p:clrMapOvr>
+    <a:masterClrMapping/>
+  </p:clrMapOvr>
+  <p:transition>
+    <p:fade/>
+  </p:transition>
+</p:sld>
+</file>
+
+<file path=ppt/slides/slide6.xml><?xml version="1.0" encoding="utf-8"?>
 <p:sld xmlns:a="http://schemas.openxmlformats.org/drawingml/2006/main" xmlns:r="http://schemas.openxmlformats.org/officeDocument/2006/relationships" xmlns:p="http://schemas.openxmlformats.org/presentationml/2006/main">
   <p:cSld>
     <p:spTree>
@@ -39202,7 +39559,7 @@
 </p:sld>
 </file>
 
-<file path=ppt/slides/slide6.xml><?xml version="1.0" encoding="utf-8"?>
+<file path=ppt/slides/slide7.xml><?xml version="1.0" encoding="utf-8"?>
 <p:sld xmlns:a="http://schemas.openxmlformats.org/drawingml/2006/main" xmlns:r="http://schemas.openxmlformats.org/officeDocument/2006/relationships" xmlns:p="http://schemas.openxmlformats.org/presentationml/2006/main">
   <p:cSld>
     <p:spTree>
@@ -39263,7 +39620,7 @@
 </p:sld>
 </file>
 
-<file path=ppt/slides/slide7.xml><?xml version="1.0" encoding="utf-8"?>
+<file path=ppt/slides/slide8.xml><?xml version="1.0" encoding="utf-8"?>
 <p:sld xmlns:a="http://schemas.openxmlformats.org/drawingml/2006/main" xmlns:r="http://schemas.openxmlformats.org/officeDocument/2006/relationships" xmlns:p="http://schemas.openxmlformats.org/presentationml/2006/main">
   <p:cSld>
     <p:spTree>
@@ -40500,16 +40857,16 @@
 <file path=customXml/itemProps2.xml><?xml version="1.0" encoding="utf-8"?>
 <ds:datastoreItem xmlns:ds="http://schemas.openxmlformats.org/officeDocument/2006/customXml" ds:itemID="{F990F116-B58F-4255-B05B-DA3808E0E5C6}">
   <ds:schemaRefs>
+    <ds:schemaRef ds:uri="http://schemas.microsoft.com/office/infopath/2007/PartnerControls"/>
+    <ds:schemaRef ds:uri="http://purl.org/dc/elements/1.1/"/>
+    <ds:schemaRef ds:uri="http://purl.org/dc/dcmitype/"/>
+    <ds:schemaRef ds:uri="http://schemas.microsoft.com/office/2006/documentManagement/types"/>
+    <ds:schemaRef ds:uri="http://www.w3.org/XML/1998/namespace"/>
+    <ds:schemaRef ds:uri="faf12e0e-2dae-4c79-960d-0c36bb039773"/>
     <ds:schemaRef ds:uri="http://schemas.openxmlformats.org/package/2006/metadata/core-properties"/>
+    <ds:schemaRef ds:uri="http://schemas.microsoft.com/office/2006/metadata/properties"/>
+    <ds:schemaRef ds:uri="cf1a6e66-1f70-4758-bffa-fec7fdad6eba"/>
     <ds:schemaRef ds:uri="http://purl.org/dc/terms/"/>
-    <ds:schemaRef ds:uri="http://purl.org/dc/elements/1.1/"/>
-    <ds:schemaRef ds:uri="faf12e0e-2dae-4c79-960d-0c36bb039773"/>
-    <ds:schemaRef ds:uri="http://schemas.microsoft.com/office/2006/documentManagement/types"/>
-    <ds:schemaRef ds:uri="http://schemas.microsoft.com/office/2006/metadata/properties"/>
-    <ds:schemaRef ds:uri="http://schemas.microsoft.com/office/infopath/2007/PartnerControls"/>
-    <ds:schemaRef ds:uri="cf1a6e66-1f70-4758-bffa-fec7fdad6eba"/>
-    <ds:schemaRef ds:uri="http://www.w3.org/XML/1998/namespace"/>
-    <ds:schemaRef ds:uri="http://purl.org/dc/dcmitype/"/>
   </ds:schemaRefs>
 </ds:datastoreItem>
 </file>
